--- a/LabBook_20.pptx
+++ b/LabBook_20.pptx
@@ -819,7 +819,7 @@
           <a:p>
             <a:fld id="{8438F8DC-35B0-48E6-A86E-42F1F08DD00F}" type="datetimeFigureOut">
               <a:rPr lang="es-ES" smtClean="0"/>
-              <a:t>09/03/2026</a:t>
+              <a:t>12/03/2026</a:t>
             </a:fld>
             <a:endParaRPr lang="es-ES"/>
           </a:p>
@@ -996,7 +996,7 @@
           <a:p>
             <a:fld id="{FACBDC12-F39B-4B97-8F4D-6734F9D366FF}" type="datetimeFigureOut">
               <a:rPr lang="es-ES" smtClean="0"/>
-              <a:t>09/03/2026</a:t>
+              <a:t>12/03/2026</a:t>
             </a:fld>
             <a:endParaRPr lang="es-ES"/>
           </a:p>
@@ -4104,7 +4104,7 @@
         <p:spPr>
           <a:xfrm>
             <a:off x="2749676" y="5610250"/>
-            <a:ext cx="8223124" cy="289823"/>
+            <a:ext cx="8223124" cy="579646"/>
           </a:xfrm>
           <a:prstGeom prst="rect">
             <a:avLst/>
@@ -4125,20 +4125,44 @@
               </a:spcBef>
             </a:pPr>
             <a:r>
-              <a:rPr lang="es-ES" spc="165" dirty="0" err="1">
+              <a:rPr lang="pt-BR" spc="165" dirty="0" err="1">
                 <a:latin typeface="Arial"/>
                 <a:cs typeface="Arial"/>
               </a:rPr>
               <a:t>Student</a:t>
             </a:r>
             <a:r>
-              <a:rPr lang="es-ES" spc="165" dirty="0">
+              <a:rPr lang="pt-BR" spc="165" dirty="0">
                 <a:latin typeface="Arial"/>
                 <a:cs typeface="Arial"/>
               </a:rPr>
-              <a:t>: </a:t>
-            </a:r>
-            <a:endParaRPr sz="1800" dirty="0">
+              <a:t>: José Alberto Peña Cruz, Pablo de Manuel Vicente</a:t>
+            </a:r>
+          </a:p>
+          <a:p>
+            <a:pPr marL="12700">
+              <a:lnSpc>
+                <a:spcPct val="100000"/>
+              </a:lnSpc>
+              <a:spcBef>
+                <a:spcPts val="100"/>
+              </a:spcBef>
+            </a:pPr>
+            <a:r>
+              <a:rPr lang="pt-BR" spc="165" dirty="0" err="1">
+                <a:latin typeface="Arial"/>
+                <a:cs typeface="Arial"/>
+              </a:rPr>
+              <a:t>Group</a:t>
+            </a:r>
+            <a:r>
+              <a:rPr lang="pt-BR" spc="165" dirty="0">
+                <a:latin typeface="Arial"/>
+                <a:cs typeface="Arial"/>
+              </a:rPr>
+              <a:t>: B1 </a:t>
+            </a:r>
+            <a:endParaRPr lang="pt-BR" dirty="0">
               <a:latin typeface="Arial"/>
               <a:cs typeface="Arial"/>
             </a:endParaRPr>
@@ -12970,8 +12994,8 @@
           </p:sp>
         </mc:Fallback>
       </mc:AlternateContent>
-      <mc:AlternateContent xmlns:mc="http://schemas.openxmlformats.org/markup-compatibility/2006">
-        <mc:Choice xmlns:a14="http://schemas.microsoft.com/office/drawing/2010/main" Requires="a14">
+      <mc:AlternateContent xmlns:mc="http://schemas.openxmlformats.org/markup-compatibility/2006" xmlns:a14="http://schemas.microsoft.com/office/drawing/2010/main">
+        <mc:Choice Requires="a14">
           <p:sp>
             <p:nvSpPr>
               <p:cNvPr id="10" name="CuadroTexto 9">
@@ -13057,7 +13081,7 @@
             </p:txBody>
           </p:sp>
         </mc:Choice>
-        <mc:Fallback>
+        <mc:Fallback xmlns="">
           <p:sp>
             <p:nvSpPr>
               <p:cNvPr id="10" name="CuadroTexto 9">
@@ -13428,8 +13452,8 @@
           </a:p>
         </p:txBody>
       </p:sp>
-      <mc:AlternateContent xmlns:mc="http://schemas.openxmlformats.org/markup-compatibility/2006">
-        <mc:Choice xmlns:a14="http://schemas.microsoft.com/office/drawing/2010/main" Requires="a14">
+      <mc:AlternateContent xmlns:mc="http://schemas.openxmlformats.org/markup-compatibility/2006" xmlns:a14="http://schemas.microsoft.com/office/drawing/2010/main">
+        <mc:Choice Requires="a14">
           <p:sp>
             <p:nvSpPr>
               <p:cNvPr id="4" name="Marcador de texto 2">
@@ -13663,7 +13687,7 @@
             </p:txBody>
           </p:sp>
         </mc:Choice>
-        <mc:Fallback>
+        <mc:Fallback xmlns="">
           <p:sp>
             <p:nvSpPr>
               <p:cNvPr id="4" name="Marcador de texto 2">

--- a/LabBook_20.pptx
+++ b/LabBook_20.pptx
@@ -1291,6 +1291,13 @@
           </p:nvPr>
         </p:nvSpPr>
         <p:spPr/>
+        <p:txBody>
+          <a:bodyPr/>
+          <a:lstStyle/>
+          <a:p>
+            <a:endParaRPr lang="es-ES"/>
+          </a:p>
+        </p:txBody>
       </p:sp>
       <p:sp>
         <p:nvSpPr>
@@ -1375,6 +1382,13 @@
           </p:nvPr>
         </p:nvSpPr>
         <p:spPr/>
+        <p:txBody>
+          <a:bodyPr/>
+          <a:lstStyle/>
+          <a:p>
+            <a:endParaRPr lang="es-ES"/>
+          </a:p>
+        </p:txBody>
       </p:sp>
       <p:sp>
         <p:nvSpPr>
@@ -1471,6 +1485,13 @@
           </p:nvPr>
         </p:nvSpPr>
         <p:spPr/>
+        <p:txBody>
+          <a:bodyPr/>
+          <a:lstStyle/>
+          <a:p>
+            <a:endParaRPr lang="es-ES"/>
+          </a:p>
+        </p:txBody>
       </p:sp>
       <p:sp>
         <p:nvSpPr>
@@ -1579,6 +1600,13 @@
           </p:nvPr>
         </p:nvSpPr>
         <p:spPr/>
+        <p:txBody>
+          <a:bodyPr/>
+          <a:lstStyle/>
+          <a:p>
+            <a:endParaRPr lang="es-ES"/>
+          </a:p>
+        </p:txBody>
       </p:sp>
       <p:sp>
         <p:nvSpPr>
@@ -1687,6 +1715,13 @@
           </p:nvPr>
         </p:nvSpPr>
         <p:spPr/>
+        <p:txBody>
+          <a:bodyPr/>
+          <a:lstStyle/>
+          <a:p>
+            <a:endParaRPr lang="es-ES"/>
+          </a:p>
+        </p:txBody>
       </p:sp>
       <p:sp>
         <p:nvSpPr>
@@ -1795,6 +1830,13 @@
           </p:nvPr>
         </p:nvSpPr>
         <p:spPr/>
+        <p:txBody>
+          <a:bodyPr/>
+          <a:lstStyle/>
+          <a:p>
+            <a:endParaRPr lang="es-ES"/>
+          </a:p>
+        </p:txBody>
       </p:sp>
       <p:sp>
         <p:nvSpPr>
@@ -1903,6 +1945,13 @@
           </p:nvPr>
         </p:nvSpPr>
         <p:spPr/>
+        <p:txBody>
+          <a:bodyPr/>
+          <a:lstStyle/>
+          <a:p>
+            <a:endParaRPr lang="es-ES"/>
+          </a:p>
+        </p:txBody>
       </p:sp>
       <p:sp>
         <p:nvSpPr>
@@ -2011,6 +2060,13 @@
           </p:nvPr>
         </p:nvSpPr>
         <p:spPr/>
+        <p:txBody>
+          <a:bodyPr/>
+          <a:lstStyle/>
+          <a:p>
+            <a:endParaRPr lang="es-ES"/>
+          </a:p>
+        </p:txBody>
       </p:sp>
       <p:sp>
         <p:nvSpPr>
@@ -2119,6 +2175,13 @@
           </p:nvPr>
         </p:nvSpPr>
         <p:spPr/>
+        <p:txBody>
+          <a:bodyPr/>
+          <a:lstStyle/>
+          <a:p>
+            <a:endParaRPr lang="es-ES"/>
+          </a:p>
+        </p:txBody>
       </p:sp>
       <p:sp>
         <p:nvSpPr>
@@ -2227,6 +2290,13 @@
           </p:nvPr>
         </p:nvSpPr>
         <p:spPr/>
+        <p:txBody>
+          <a:bodyPr/>
+          <a:lstStyle/>
+          <a:p>
+            <a:endParaRPr lang="es-ES"/>
+          </a:p>
+        </p:txBody>
       </p:sp>
       <p:sp>
         <p:nvSpPr>
@@ -2335,6 +2405,13 @@
           </p:nvPr>
         </p:nvSpPr>
         <p:spPr/>
+        <p:txBody>
+          <a:bodyPr/>
+          <a:lstStyle/>
+          <a:p>
+            <a:endParaRPr lang="es-ES"/>
+          </a:p>
+        </p:txBody>
       </p:sp>
       <p:sp>
         <p:nvSpPr>
@@ -2443,6 +2520,13 @@
           </p:nvPr>
         </p:nvSpPr>
         <p:spPr/>
+        <p:txBody>
+          <a:bodyPr/>
+          <a:lstStyle/>
+          <a:p>
+            <a:endParaRPr lang="es-ES"/>
+          </a:p>
+        </p:txBody>
       </p:sp>
       <p:sp>
         <p:nvSpPr>
@@ -2551,6 +2635,13 @@
           </p:nvPr>
         </p:nvSpPr>
         <p:spPr/>
+        <p:txBody>
+          <a:bodyPr/>
+          <a:lstStyle/>
+          <a:p>
+            <a:endParaRPr lang="es-ES"/>
+          </a:p>
+        </p:txBody>
       </p:sp>
       <p:sp>
         <p:nvSpPr>
@@ -11532,7 +11623,7 @@
         <p:spPr>
           <a:xfrm>
             <a:off x="609441" y="4860334"/>
-            <a:ext cx="11199971" cy="1200329"/>
+            <a:ext cx="11199971" cy="1754326"/>
           </a:xfrm>
           <a:prstGeom prst="rect">
             <a:avLst/>
@@ -11560,33 +11651,8 @@
                 <a:latin typeface="Arial" panose="020B0604020202020204" pitchFamily="34" charset="0"/>
                 <a:cs typeface="Arial" panose="020B0604020202020204" pitchFamily="34" charset="0"/>
               </a:rPr>
-              <a:t>Document all your results (neff, plot fields </a:t>
-            </a:r>
-            <a:r>
-              <a:rPr lang="en-US" sz="1200">
-                <a:latin typeface="Arial" panose="020B0604020202020204" pitchFamily="34" charset="0"/>
-                <a:cs typeface="Arial" panose="020B0604020202020204" pitchFamily="34" charset="0"/>
-              </a:rPr>
-              <a:t>of different modes, </a:t>
-            </a:r>
-            <a:r>
-              <a:rPr lang="en-US" sz="1200" dirty="0">
-                <a:latin typeface="Arial" panose="020B0604020202020204" pitchFamily="34" charset="0"/>
-                <a:cs typeface="Arial" panose="020B0604020202020204" pitchFamily="34" charset="0"/>
-              </a:rPr>
-              <a:t>comparison between </a:t>
-            </a:r>
-            <a:r>
-              <a:rPr lang="en-US" sz="1200">
-                <a:latin typeface="Arial" panose="020B0604020202020204" pitchFamily="34" charset="0"/>
-                <a:cs typeface="Arial" panose="020B0604020202020204" pitchFamily="34" charset="0"/>
-              </a:rPr>
-              <a:t>different polarizations…)</a:t>
-            </a:r>
-            <a:endParaRPr lang="en-US" sz="1200" dirty="0">
-              <a:latin typeface="Arial" panose="020B0604020202020204" pitchFamily="34" charset="0"/>
-              <a:cs typeface="Arial" panose="020B0604020202020204" pitchFamily="34" charset="0"/>
-            </a:endParaRPr>
+              <a:t>Document all your results (neff, plot fields of different modes, comparison between different polarizations…)</a:t>
+            </a:r>
           </a:p>
           <a:p>
             <a:pPr algn="just"/>
@@ -11597,7 +11663,31 @@
           </a:p>
           <a:p>
             <a:pPr algn="just"/>
-            <a:endParaRPr lang="en-US" sz="1200" dirty="0">
+            <a:r>
+              <a:rPr lang="es-ES" sz="1200" noProof="0" dirty="0">
+                <a:latin typeface="Arial" panose="020B0604020202020204" pitchFamily="34" charset="0"/>
+                <a:cs typeface="Arial" panose="020B0604020202020204" pitchFamily="34" charset="0"/>
+              </a:rPr>
+              <a:t>Se propagan los 4 primeros modos, se transmiten en parejas, es decir, los modos TE0 y TE1 van emparejados , lo mismo pasa con los modos TM. Estos modos se parecen mucho a los modos fundaméntales de la guía cuando se simula por si sola.</a:t>
+            </a:r>
+          </a:p>
+          <a:p>
+            <a:pPr algn="just"/>
+            <a:r>
+              <a:rPr lang="es-ES" sz="1200" noProof="0" dirty="0">
+                <a:latin typeface="Arial" panose="020B0604020202020204" pitchFamily="34" charset="0"/>
+                <a:cs typeface="Arial" panose="020B0604020202020204" pitchFamily="34" charset="0"/>
+              </a:rPr>
+              <a:t>Modo 1 y 2 son modos fundaméntales TE con la particularidad de que el modo 2 es antisimétrico (tiene un lóbulo positivo y uno negativo). Este mismo resultado se repite para los modos Tm correspondiente a </a:t>
+            </a:r>
+            <a:r>
+              <a:rPr lang="es-ES" sz="1200" noProof="0">
+                <a:latin typeface="Arial" panose="020B0604020202020204" pitchFamily="34" charset="0"/>
+                <a:cs typeface="Arial" panose="020B0604020202020204" pitchFamily="34" charset="0"/>
+              </a:rPr>
+              <a:t>los modos 3 y 4.</a:t>
+            </a:r>
+            <a:endParaRPr lang="es-ES" sz="1200" noProof="0" dirty="0">
               <a:latin typeface="Arial" panose="020B0604020202020204" pitchFamily="34" charset="0"/>
               <a:cs typeface="Arial" panose="020B0604020202020204" pitchFamily="34" charset="0"/>
             </a:endParaRPr>

--- a/LabBook_20.pptx
+++ b/LabBook_20.pptx
@@ -825,7 +825,7 @@
           <a:p>
             <a:fld id="{8438F8DC-35B0-48E6-A86E-42F1F08DD00F}" type="datetimeFigureOut">
               <a:rPr lang="es-ES" smtClean="0"/>
-              <a:t>28/04/2026</a:t>
+              <a:t>30/04/2026</a:t>
             </a:fld>
             <a:endParaRPr lang="es-ES"/>
           </a:p>
@@ -1002,7 +1002,7 @@
           <a:p>
             <a:fld id="{FACBDC12-F39B-4B97-8F4D-6734F9D366FF}" type="datetimeFigureOut">
               <a:rPr lang="es-ES" smtClean="0"/>
-              <a:t>28/04/2026</a:t>
+              <a:t>30/04/2026</a:t>
             </a:fld>
             <a:endParaRPr lang="es-ES"/>
           </a:p>
@@ -9023,8 +9023,8 @@
         </p:nvSpPr>
         <p:spPr>
           <a:xfrm>
-            <a:off x="609441" y="4819471"/>
-            <a:ext cx="11199971" cy="1384995"/>
+            <a:off x="609441" y="4678740"/>
+            <a:ext cx="11199971" cy="1569660"/>
           </a:xfrm>
           <a:prstGeom prst="rect">
             <a:avLst/>
@@ -9046,56 +9046,128 @@
           </a:bodyPr>
           <a:lstStyle/>
           <a:p>
-            <a:pPr algn="just"/>
-            <a:r>
-              <a:rPr lang="en-US" sz="1200" dirty="0">
-                <a:latin typeface="Arial" panose="020B0604020202020204" pitchFamily="34" charset="0"/>
-                <a:cs typeface="Arial" panose="020B0604020202020204" pitchFamily="34" charset="0"/>
-              </a:rPr>
-              <a:t>Comment results</a:t>
-            </a:r>
-          </a:p>
-          <a:p>
-            <a:pPr algn="just"/>
-            <a:endParaRPr lang="en-US" sz="1200" dirty="0">
-              <a:latin typeface="Arial" panose="020B0604020202020204" pitchFamily="34" charset="0"/>
-              <a:cs typeface="Arial" panose="020B0604020202020204" pitchFamily="34" charset="0"/>
-            </a:endParaRPr>
-          </a:p>
-          <a:p>
-            <a:pPr algn="just"/>
-            <a:endParaRPr lang="en-US" sz="1200" dirty="0">
-              <a:latin typeface="Arial" panose="020B0604020202020204" pitchFamily="34" charset="0"/>
-              <a:cs typeface="Arial" panose="020B0604020202020204" pitchFamily="34" charset="0"/>
-            </a:endParaRPr>
-          </a:p>
-          <a:p>
-            <a:pPr algn="just"/>
-            <a:endParaRPr lang="en-US" sz="1200" dirty="0">
-              <a:latin typeface="Arial" panose="020B0604020202020204" pitchFamily="34" charset="0"/>
-              <a:cs typeface="Arial" panose="020B0604020202020204" pitchFamily="34" charset="0"/>
-            </a:endParaRPr>
-          </a:p>
-          <a:p>
-            <a:pPr algn="just"/>
-            <a:endParaRPr lang="en-US" sz="1200" dirty="0">
-              <a:latin typeface="Arial" panose="020B0604020202020204" pitchFamily="34" charset="0"/>
-              <a:cs typeface="Arial" panose="020B0604020202020204" pitchFamily="34" charset="0"/>
-            </a:endParaRPr>
-          </a:p>
-          <a:p>
-            <a:pPr algn="just"/>
-            <a:endParaRPr lang="en-US" sz="1200" dirty="0">
-              <a:latin typeface="Arial" panose="020B0604020202020204" pitchFamily="34" charset="0"/>
-              <a:cs typeface="Arial" panose="020B0604020202020204" pitchFamily="34" charset="0"/>
-            </a:endParaRPr>
-          </a:p>
-          <a:p>
-            <a:pPr algn="just"/>
-            <a:endParaRPr lang="en-US" sz="1200" dirty="0">
-              <a:latin typeface="Arial" panose="020B0604020202020204" pitchFamily="34" charset="0"/>
-              <a:cs typeface="Arial" panose="020B0604020202020204" pitchFamily="34" charset="0"/>
-            </a:endParaRPr>
+            <a:pPr marL="285750" indent="-285750">
+              <a:buFont typeface="Arial" panose="020B0604020202020204" pitchFamily="34" charset="0"/>
+              <a:buChar char="•"/>
+            </a:pPr>
+            <a:r>
+              <a:rPr lang="es-ES" sz="1600" dirty="0"/>
+              <a:t>En esta segunda optimización se ha aumentado la anchura de las guías de entrada y salida con </a:t>
+            </a:r>
+            <a:r>
+              <a:rPr lang="es-ES" sz="1600" dirty="0" err="1"/>
+              <a:t>wg_width_dw</a:t>
+            </a:r>
+            <a:r>
+              <a:rPr lang="es-ES" sz="1600" dirty="0"/>
+              <a:t> = 0.7 </a:t>
+            </a:r>
+            <a:r>
+              <a:rPr lang="es-ES" sz="1600" dirty="0" err="1"/>
+              <a:t>um</a:t>
+            </a:r>
+            <a:r>
+              <a:rPr lang="es-ES" sz="1600" dirty="0"/>
+              <a:t>. </a:t>
+            </a:r>
+          </a:p>
+          <a:p>
+            <a:pPr marL="285750" indent="-285750">
+              <a:buFont typeface="Arial" panose="020B0604020202020204" pitchFamily="34" charset="0"/>
+              <a:buChar char="•"/>
+            </a:pPr>
+            <a:r>
+              <a:rPr lang="es-ES" sz="1600" dirty="0"/>
+              <a:t>También hemos modificado el ajuste de posición y longitud con </a:t>
+            </a:r>
+            <a:r>
+              <a:rPr lang="es-ES" sz="1600" dirty="0" err="1"/>
+              <a:t>dy</a:t>
+            </a:r>
+            <a:r>
+              <a:rPr lang="es-ES" sz="1600" dirty="0"/>
+              <a:t> = 0.065 </a:t>
+            </a:r>
+            <a:r>
+              <a:rPr lang="es-ES" sz="1600" dirty="0" err="1"/>
+              <a:t>um</a:t>
+            </a:r>
+            <a:r>
+              <a:rPr lang="es-ES" sz="1600" dirty="0"/>
+              <a:t> y </a:t>
+            </a:r>
+            <a:r>
+              <a:rPr lang="es-ES" sz="1600" dirty="0" err="1"/>
+              <a:t>dL_MMI</a:t>
+            </a:r>
+            <a:r>
+              <a:rPr lang="es-ES" sz="1600" dirty="0"/>
+              <a:t> = -0.60 </a:t>
+            </a:r>
+            <a:r>
+              <a:rPr lang="es-ES" sz="1600" dirty="0" err="1"/>
+              <a:t>um</a:t>
+            </a:r>
+            <a:r>
+              <a:rPr lang="es-ES" sz="1600" dirty="0"/>
+              <a:t>.</a:t>
+            </a:r>
+          </a:p>
+          <a:p>
+            <a:pPr marL="285750" indent="-285750">
+              <a:buFont typeface="Arial" panose="020B0604020202020204" pitchFamily="34" charset="0"/>
+              <a:buChar char="•"/>
+            </a:pPr>
+            <a:r>
+              <a:rPr lang="es-ES" sz="1600" dirty="0"/>
+              <a:t>Con este cambio se consigue reducir mucho la pérdida</a:t>
+            </a:r>
+          </a:p>
+          <a:p>
+            <a:pPr marL="742950" lvl="1" indent="-285750">
+              <a:buFont typeface="Arial" panose="020B0604020202020204" pitchFamily="34" charset="0"/>
+              <a:buChar char="•"/>
+            </a:pPr>
+            <a:r>
+              <a:rPr lang="es-ES" sz="1600" dirty="0"/>
+              <a:t>el </a:t>
+            </a:r>
+            <a:r>
+              <a:rPr lang="es-ES" sz="1600" dirty="0" err="1"/>
+              <a:t>excess</a:t>
+            </a:r>
+            <a:r>
+              <a:rPr lang="es-ES" sz="1600" dirty="0"/>
+              <a:t> </a:t>
+            </a:r>
+            <a:r>
+              <a:rPr lang="es-ES" sz="1600" dirty="0" err="1"/>
+              <a:t>loss</a:t>
+            </a:r>
+            <a:r>
+              <a:rPr lang="es-ES" sz="1600" dirty="0"/>
+              <a:t> baja hasta 0.0773 dB, cumpliendo el objetivo de estar por debajo de 0.1 dB.</a:t>
+            </a:r>
+          </a:p>
+          <a:p>
+            <a:pPr marL="285750" indent="-285750">
+              <a:buFont typeface="Arial" panose="020B0604020202020204" pitchFamily="34" charset="0"/>
+              <a:buChar char="•"/>
+            </a:pPr>
+            <a:r>
+              <a:rPr lang="es-ES" sz="1600" dirty="0"/>
+              <a:t>El reparto de potencia queda cercano al 50/50, con ratio 0.5103 / 0.4897. </a:t>
+            </a:r>
+          </a:p>
+          <a:p>
+            <a:pPr marL="285750" indent="-285750">
+              <a:buFont typeface="Arial" panose="020B0604020202020204" pitchFamily="34" charset="0"/>
+              <a:buChar char="•"/>
+            </a:pPr>
+            <a:r>
+              <a:rPr lang="es-ES" sz="1600" dirty="0"/>
+              <a:t>Aumentar la anchura de las guías I/O mejora el acoplo de entrada/salida al MMI y reduce claramente las pérdidas.</a:t>
+            </a:r>
           </a:p>
         </p:txBody>
       </p:sp>
@@ -9113,7 +9185,7 @@
         </p:nvSpPr>
         <p:spPr>
           <a:xfrm>
-            <a:off x="609441" y="1377510"/>
+            <a:off x="609441" y="1236779"/>
             <a:ext cx="11199971" cy="3306028"/>
           </a:xfrm>
           <a:prstGeom prst="rect">
@@ -9165,7 +9237,7 @@
         </p:nvSpPr>
         <p:spPr>
           <a:xfrm>
-            <a:off x="640245" y="1942909"/>
+            <a:off x="228600" y="1524000"/>
             <a:ext cx="11199972" cy="2708434"/>
           </a:xfrm>
           <a:prstGeom prst="rect">
@@ -9257,6 +9329,66 @@
           </a:p>
         </p:txBody>
       </p:sp>
+      <p:pic>
+        <p:nvPicPr>
+          <p:cNvPr id="12" name="Imagen 11">
+            <a:extLst>
+              <a:ext uri="{FF2B5EF4-FFF2-40B4-BE49-F238E27FC236}">
+                <a16:creationId xmlns:a16="http://schemas.microsoft.com/office/drawing/2014/main" id="{8BC538B7-A6B9-531A-F2AF-B69989307827}"/>
+              </a:ext>
+            </a:extLst>
+          </p:cNvPr>
+          <p:cNvPicPr>
+            <a:picLocks noChangeAspect="1"/>
+          </p:cNvPicPr>
+          <p:nvPr/>
+        </p:nvPicPr>
+        <p:blipFill>
+          <a:blip r:embed="rId4"/>
+          <a:stretch>
+            <a:fillRect/>
+          </a:stretch>
+        </p:blipFill>
+        <p:spPr>
+          <a:xfrm>
+            <a:off x="4850015" y="1608847"/>
+            <a:ext cx="6511767" cy="2708434"/>
+          </a:xfrm>
+          <a:prstGeom prst="rect">
+            <a:avLst/>
+          </a:prstGeom>
+        </p:spPr>
+      </p:pic>
+      <p:pic>
+        <p:nvPicPr>
+          <p:cNvPr id="14" name="Imagen 13">
+            <a:extLst>
+              <a:ext uri="{FF2B5EF4-FFF2-40B4-BE49-F238E27FC236}">
+                <a16:creationId xmlns:a16="http://schemas.microsoft.com/office/drawing/2014/main" id="{B5789AE8-A41C-8B26-A79B-D6CF5FF1452A}"/>
+              </a:ext>
+            </a:extLst>
+          </p:cNvPr>
+          <p:cNvPicPr>
+            <a:picLocks noChangeAspect="1"/>
+          </p:cNvPicPr>
+          <p:nvPr/>
+        </p:nvPicPr>
+        <p:blipFill>
+          <a:blip r:embed="rId5"/>
+          <a:stretch>
+            <a:fillRect/>
+          </a:stretch>
+        </p:blipFill>
+        <p:spPr>
+          <a:xfrm>
+            <a:off x="830218" y="1345419"/>
+            <a:ext cx="4359206" cy="3131554"/>
+          </a:xfrm>
+          <a:prstGeom prst="rect">
+            <a:avLst/>
+          </a:prstGeom>
+        </p:spPr>
+      </p:pic>
     </p:spTree>
     <p:extLst>
       <p:ext uri="{BB962C8B-B14F-4D97-AF65-F5344CB8AC3E}">
@@ -9349,7 +9481,7 @@
             </a:r>
             <a:r>
               <a:rPr lang="en-US" b="0" dirty="0"/>
-              <a:t> = ? µm</a:t>
+              <a:t> = 12 µm</a:t>
             </a:r>
             <a:endParaRPr lang="en-US" sz="2500" b="0" dirty="0">
               <a:latin typeface="+mj-lt"/>
@@ -9471,8 +9603,8 @@
         </p:nvSpPr>
         <p:spPr>
           <a:xfrm>
-            <a:off x="609441" y="4819471"/>
-            <a:ext cx="11199971" cy="1200329"/>
+            <a:off x="609441" y="4508761"/>
+            <a:ext cx="11199971" cy="1569660"/>
           </a:xfrm>
           <a:prstGeom prst="rect">
             <a:avLst/>
@@ -9496,61 +9628,140 @@
           <a:p>
             <a:pPr algn="just"/>
             <a:r>
-              <a:rPr lang="en-US" sz="1200" dirty="0">
+              <a:rPr lang="en-US" sz="1200" b="1" dirty="0">
                 <a:latin typeface="Arial" panose="020B0604020202020204" pitchFamily="34" charset="0"/>
                 <a:cs typeface="Arial" panose="020B0604020202020204" pitchFamily="34" charset="0"/>
               </a:rPr>
-              <a:t>Repeat all the design </a:t>
-            </a:r>
-            <a:r>
-              <a:rPr lang="en-US" sz="1200">
-                <a:latin typeface="Arial" panose="020B0604020202020204" pitchFamily="34" charset="0"/>
-                <a:cs typeface="Arial" panose="020B0604020202020204" pitchFamily="34" charset="0"/>
-              </a:rPr>
-              <a:t>process for a </a:t>
-            </a:r>
-            <a:r>
-              <a:rPr lang="en-US" sz="1200" dirty="0">
-                <a:latin typeface="Arial" panose="020B0604020202020204" pitchFamily="34" charset="0"/>
-                <a:cs typeface="Arial" panose="020B0604020202020204" pitchFamily="34" charset="0"/>
-              </a:rPr>
-              <a:t>1x4 MMI Coupler.  </a:t>
-            </a:r>
-          </a:p>
-          <a:p>
-            <a:pPr algn="just"/>
-            <a:endParaRPr lang="en-US" sz="1200" dirty="0">
-              <a:latin typeface="Arial" panose="020B0604020202020204" pitchFamily="34" charset="0"/>
-              <a:cs typeface="Arial" panose="020B0604020202020204" pitchFamily="34" charset="0"/>
-            </a:endParaRPr>
-          </a:p>
-          <a:p>
-            <a:pPr algn="just"/>
-            <a:endParaRPr lang="en-US" sz="1200" dirty="0">
-              <a:latin typeface="Arial" panose="020B0604020202020204" pitchFamily="34" charset="0"/>
-              <a:cs typeface="Arial" panose="020B0604020202020204" pitchFamily="34" charset="0"/>
-            </a:endParaRPr>
-          </a:p>
-          <a:p>
-            <a:pPr algn="just"/>
-            <a:endParaRPr lang="en-US" sz="1200" dirty="0">
-              <a:latin typeface="Arial" panose="020B0604020202020204" pitchFamily="34" charset="0"/>
-              <a:cs typeface="Arial" panose="020B0604020202020204" pitchFamily="34" charset="0"/>
-            </a:endParaRPr>
-          </a:p>
-          <a:p>
-            <a:pPr algn="just"/>
-            <a:endParaRPr lang="en-US" sz="1200" dirty="0">
-              <a:latin typeface="Arial" panose="020B0604020202020204" pitchFamily="34" charset="0"/>
-              <a:cs typeface="Arial" panose="020B0604020202020204" pitchFamily="34" charset="0"/>
-            </a:endParaRPr>
-          </a:p>
-          <a:p>
-            <a:pPr algn="just"/>
-            <a:endParaRPr lang="en-US" sz="1200" dirty="0">
-              <a:latin typeface="Arial" panose="020B0604020202020204" pitchFamily="34" charset="0"/>
-              <a:cs typeface="Arial" panose="020B0604020202020204" pitchFamily="34" charset="0"/>
-            </a:endParaRPr>
+              <a:t>Repeat all the design process for a 1x4 MMI Coupler.  </a:t>
+            </a:r>
+          </a:p>
+          <a:p>
+            <a:pPr marL="285750" indent="-285750">
+              <a:buFont typeface="Arial" panose="020B0604020202020204" pitchFamily="34" charset="0"/>
+              <a:buChar char="•"/>
+            </a:pPr>
+            <a:r>
+              <a:rPr lang="es-ES" sz="1400" dirty="0"/>
+              <a:t>Hemos diseñado un MMI 1x4 con una entrada centrada y cuatro salidas colocadas simétricamente. </a:t>
+            </a:r>
+          </a:p>
+          <a:p>
+            <a:pPr marL="285750" indent="-285750">
+              <a:buFont typeface="Arial" panose="020B0604020202020204" pitchFamily="34" charset="0"/>
+              <a:buChar char="•"/>
+            </a:pPr>
+            <a:r>
+              <a:rPr lang="es-ES" sz="1400" dirty="0"/>
+              <a:t>Hemos elegido </a:t>
+            </a:r>
+            <a:r>
+              <a:rPr lang="es-ES" sz="1400" dirty="0" err="1"/>
+              <a:t>wMMI</a:t>
+            </a:r>
+            <a:r>
+              <a:rPr lang="es-ES" sz="1400" dirty="0"/>
+              <a:t> = 12.0 </a:t>
+            </a:r>
+            <a:r>
+              <a:rPr lang="es-ES" sz="1400" dirty="0" err="1"/>
+              <a:t>um</a:t>
+            </a:r>
+            <a:r>
+              <a:rPr lang="es-ES" sz="1400" dirty="0"/>
+              <a:t> para poder colocar las cuatro guías de salida.</a:t>
+            </a:r>
+          </a:p>
+          <a:p>
+            <a:pPr marL="285750" indent="-285750">
+              <a:buFont typeface="Arial" panose="020B0604020202020204" pitchFamily="34" charset="0"/>
+              <a:buChar char="•"/>
+            </a:pPr>
+            <a:r>
+              <a:rPr lang="es-ES" sz="1400" dirty="0"/>
+              <a:t>El reparto de potencia es bastante cercano al ideal de 0.25 en cada salida</a:t>
+            </a:r>
+          </a:p>
+          <a:p>
+            <a:pPr marL="742950" lvl="1" indent="-285750">
+              <a:buFont typeface="Arial" panose="020B0604020202020204" pitchFamily="34" charset="0"/>
+              <a:buChar char="•"/>
+            </a:pPr>
+            <a:r>
+              <a:rPr lang="es-ES" sz="1400" dirty="0"/>
+              <a:t>los ratios obtenidos son 0.2463, 0.2537, 0.2538, 0.2462.</a:t>
+            </a:r>
+          </a:p>
+          <a:p>
+            <a:pPr marL="285750" indent="-285750">
+              <a:buFont typeface="Arial" panose="020B0604020202020204" pitchFamily="34" charset="0"/>
+              <a:buChar char="•"/>
+            </a:pPr>
+            <a:r>
+              <a:rPr lang="es-ES" sz="1400" dirty="0"/>
+              <a:t>Para reducir pérdidas hemos aumentado la anchura de las guías de entrada /salida con </a:t>
+            </a:r>
+            <a:r>
+              <a:rPr lang="es-ES" sz="1400" dirty="0" err="1"/>
+              <a:t>wg_width_dw</a:t>
+            </a:r>
+            <a:r>
+              <a:rPr lang="es-ES" sz="1400" dirty="0"/>
+              <a:t> = 0.6 </a:t>
+            </a:r>
+            <a:r>
+              <a:rPr lang="es-ES" sz="1400" dirty="0" err="1"/>
+              <a:t>um</a:t>
+            </a:r>
+            <a:r>
+              <a:rPr lang="es-ES" sz="1400" dirty="0"/>
+              <a:t> y la longitud con </a:t>
+            </a:r>
+            <a:r>
+              <a:rPr lang="es-ES" sz="1400" dirty="0" err="1"/>
+              <a:t>dL_MMI</a:t>
+            </a:r>
+            <a:r>
+              <a:rPr lang="es-ES" sz="1400" dirty="0"/>
+              <a:t> = -0.5 </a:t>
+            </a:r>
+            <a:r>
+              <a:rPr lang="es-ES" sz="1400" dirty="0" err="1"/>
+              <a:t>um</a:t>
+            </a:r>
+            <a:r>
+              <a:rPr lang="es-ES" sz="1400" dirty="0"/>
+              <a:t>. </a:t>
+            </a:r>
+          </a:p>
+          <a:p>
+            <a:pPr marL="285750" indent="-285750">
+              <a:buFont typeface="Arial" panose="020B0604020202020204" pitchFamily="34" charset="0"/>
+              <a:buChar char="•"/>
+            </a:pPr>
+            <a:r>
+              <a:rPr lang="es-ES" sz="1400" dirty="0"/>
+              <a:t>Con esto el </a:t>
+            </a:r>
+            <a:r>
+              <a:rPr lang="es-ES" sz="1400" i="1" dirty="0" err="1"/>
+              <a:t>excess</a:t>
+            </a:r>
+            <a:r>
+              <a:rPr lang="es-ES" sz="1400" i="1" dirty="0"/>
+              <a:t> </a:t>
+            </a:r>
+            <a:r>
+              <a:rPr lang="es-ES" sz="1400" i="1" dirty="0" err="1"/>
+              <a:t>loss</a:t>
+            </a:r>
+            <a:r>
+              <a:rPr lang="es-ES" sz="1400" i="1" dirty="0"/>
+              <a:t> </a:t>
+            </a:r>
+            <a:r>
+              <a:rPr lang="es-ES" sz="1400" dirty="0"/>
+              <a:t>baja hasta 0.2097 dB.</a:t>
+            </a:r>
           </a:p>
         </p:txBody>
       </p:sp>
@@ -9568,8 +9779,8 @@
         </p:nvSpPr>
         <p:spPr>
           <a:xfrm>
-            <a:off x="609441" y="1377510"/>
-            <a:ext cx="11199971" cy="3306028"/>
+            <a:off x="609441" y="1277396"/>
+            <a:ext cx="11199971" cy="3095432"/>
           </a:xfrm>
           <a:prstGeom prst="rect">
             <a:avLst/>
@@ -9657,6 +9868,66 @@
           </a:p>
         </p:txBody>
       </p:sp>
+      <p:pic>
+        <p:nvPicPr>
+          <p:cNvPr id="9" name="Imagen 8">
+            <a:extLst>
+              <a:ext uri="{FF2B5EF4-FFF2-40B4-BE49-F238E27FC236}">
+                <a16:creationId xmlns:a16="http://schemas.microsoft.com/office/drawing/2014/main" id="{543B08EE-498B-B4D2-8671-D76EC46A961F}"/>
+              </a:ext>
+            </a:extLst>
+          </p:cNvPr>
+          <p:cNvPicPr>
+            <a:picLocks noChangeAspect="1"/>
+          </p:cNvPicPr>
+          <p:nvPr/>
+        </p:nvPicPr>
+        <p:blipFill>
+          <a:blip r:embed="rId4"/>
+          <a:stretch>
+            <a:fillRect/>
+          </a:stretch>
+        </p:blipFill>
+        <p:spPr>
+          <a:xfrm>
+            <a:off x="6183005" y="1747622"/>
+            <a:ext cx="5467350" cy="2514600"/>
+          </a:xfrm>
+          <a:prstGeom prst="rect">
+            <a:avLst/>
+          </a:prstGeom>
+        </p:spPr>
+      </p:pic>
+      <p:pic>
+        <p:nvPicPr>
+          <p:cNvPr id="13" name="Imagen 12">
+            <a:extLst>
+              <a:ext uri="{FF2B5EF4-FFF2-40B4-BE49-F238E27FC236}">
+                <a16:creationId xmlns:a16="http://schemas.microsoft.com/office/drawing/2014/main" id="{6333A436-992E-D731-403C-47CAD4CD75E5}"/>
+              </a:ext>
+            </a:extLst>
+          </p:cNvPr>
+          <p:cNvPicPr>
+            <a:picLocks noChangeAspect="1"/>
+          </p:cNvPicPr>
+          <p:nvPr/>
+        </p:nvPicPr>
+        <p:blipFill>
+          <a:blip r:embed="rId5"/>
+          <a:stretch>
+            <a:fillRect/>
+          </a:stretch>
+        </p:blipFill>
+        <p:spPr>
+          <a:xfrm>
+            <a:off x="729910" y="1681456"/>
+            <a:ext cx="5492526" cy="2530265"/>
+          </a:xfrm>
+          <a:prstGeom prst="rect">
+            <a:avLst/>
+          </a:prstGeom>
+        </p:spPr>
+      </p:pic>
     </p:spTree>
     <p:extLst>
       <p:ext uri="{BB962C8B-B14F-4D97-AF65-F5344CB8AC3E}">

--- a/LabBook_20.pptx
+++ b/LabBook_20.pptx
@@ -9351,7 +9351,7 @@
         </p:blipFill>
         <p:spPr>
           <a:xfrm>
-            <a:off x="4850015" y="1608847"/>
+            <a:off x="5189424" y="1595120"/>
             <a:ext cx="6511767" cy="2708434"/>
           </a:xfrm>
           <a:prstGeom prst="rect">

--- a/LabBook_20.pptx
+++ b/LabBook_20.pptx
@@ -825,7 +825,7 @@
           <a:p>
             <a:fld id="{8438F8DC-35B0-48E6-A86E-42F1F08DD00F}" type="datetimeFigureOut">
               <a:rPr lang="es-ES" smtClean="0"/>
-              <a:t>30/04/2026</a:t>
+              <a:t>01/05/2026</a:t>
             </a:fld>
             <a:endParaRPr lang="es-ES"/>
           </a:p>
@@ -1002,7 +1002,7 @@
           <a:p>
             <a:fld id="{FACBDC12-F39B-4B97-8F4D-6734F9D366FF}" type="datetimeFigureOut">
               <a:rPr lang="es-ES" smtClean="0"/>
-              <a:t>30/04/2026</a:t>
+              <a:t>01/05/2026</a:t>
             </a:fld>
             <a:endParaRPr lang="es-ES"/>
           </a:p>
@@ -12178,7 +12178,7 @@
         <p:spPr>
           <a:xfrm>
             <a:off x="609441" y="4860334"/>
-            <a:ext cx="11199971" cy="1015663"/>
+            <a:ext cx="11199971" cy="1200329"/>
           </a:xfrm>
           <a:prstGeom prst="rect">
             <a:avLst/>
@@ -12202,7 +12202,7 @@
           <a:p>
             <a:pPr algn="just"/>
             <a:r>
-              <a:rPr lang="en-US" sz="1200" dirty="0">
+              <a:rPr lang="en-US" sz="1200" b="1" dirty="0">
                 <a:latin typeface="Arial" panose="020B0604020202020204" pitchFamily="34" charset="0"/>
                 <a:cs typeface="Arial" panose="020B0604020202020204" pitchFamily="34" charset="0"/>
               </a:rPr>
@@ -12210,32 +12210,82 @@
             </a:r>
           </a:p>
           <a:p>
-            <a:pPr algn="just"/>
-            <a:endParaRPr lang="en-US" sz="1200" dirty="0">
-              <a:latin typeface="Arial" panose="020B0604020202020204" pitchFamily="34" charset="0"/>
-              <a:cs typeface="Arial" panose="020B0604020202020204" pitchFamily="34" charset="0"/>
-            </a:endParaRPr>
-          </a:p>
-          <a:p>
-            <a:pPr algn="just"/>
-            <a:endParaRPr lang="en-US" sz="1200" dirty="0">
-              <a:latin typeface="Arial" panose="020B0604020202020204" pitchFamily="34" charset="0"/>
-              <a:cs typeface="Arial" panose="020B0604020202020204" pitchFamily="34" charset="0"/>
-            </a:endParaRPr>
-          </a:p>
-          <a:p>
-            <a:pPr algn="just"/>
-            <a:endParaRPr lang="en-US" sz="1200" dirty="0">
-              <a:latin typeface="Arial" panose="020B0604020202020204" pitchFamily="34" charset="0"/>
-              <a:cs typeface="Arial" panose="020B0604020202020204" pitchFamily="34" charset="0"/>
-            </a:endParaRPr>
-          </a:p>
-          <a:p>
-            <a:pPr algn="just"/>
-            <a:endParaRPr lang="en-US" sz="1200" dirty="0">
-              <a:latin typeface="Arial" panose="020B0604020202020204" pitchFamily="34" charset="0"/>
-              <a:cs typeface="Arial" panose="020B0604020202020204" pitchFamily="34" charset="0"/>
-            </a:endParaRPr>
+            <a:pPr marL="171450" indent="-171450">
+              <a:buFont typeface="Arial" panose="020B0604020202020204" pitchFamily="34" charset="0"/>
+              <a:buChar char="•"/>
+            </a:pPr>
+            <a:r>
+              <a:rPr lang="es-ES" sz="1200" dirty="0"/>
+              <a:t>En esta simulación se observa como al aumentar el gap aumenta </a:t>
+            </a:r>
+            <a:r>
+              <a:rPr lang="es-ES" sz="1200" dirty="0" err="1"/>
+              <a:t>Lpi</a:t>
+            </a:r>
+            <a:r>
+              <a:rPr lang="es-ES" sz="1200" dirty="0"/>
+              <a:t>. Este resultado tiene sentido, cuanto más separadas están las guías menor es el acoplamiento y más longitud hace falta para transferir potencia.</a:t>
+            </a:r>
+          </a:p>
+          <a:p>
+            <a:pPr marL="171450" indent="-171450">
+              <a:buFont typeface="Arial" panose="020B0604020202020204" pitchFamily="34" charset="0"/>
+              <a:buChar char="•"/>
+            </a:pPr>
+            <a:r>
+              <a:rPr lang="es-ES" sz="1200" dirty="0"/>
+              <a:t>En la guía </a:t>
+            </a:r>
+            <a:r>
+              <a:rPr lang="es-ES" sz="1200" b="1" dirty="0" err="1"/>
+              <a:t>deep</a:t>
+            </a:r>
+            <a:r>
+              <a:rPr lang="es-ES" sz="1200" dirty="0"/>
+              <a:t>, </a:t>
+            </a:r>
+            <a:r>
+              <a:rPr lang="es-ES" sz="1200" dirty="0" err="1"/>
+              <a:t>Lpi</a:t>
+            </a:r>
+            <a:r>
+              <a:rPr lang="es-ES" sz="1200" dirty="0"/>
+              <a:t> crece muy rápido sobre todo para el modo TE. Esto muestra que para gaps grandes las guías quedan prácticamente desacopladas.</a:t>
+            </a:r>
+          </a:p>
+          <a:p>
+            <a:pPr marL="171450" indent="-171450">
+              <a:buFont typeface="Arial" panose="020B0604020202020204" pitchFamily="34" charset="0"/>
+              <a:buChar char="•"/>
+            </a:pPr>
+            <a:r>
+              <a:rPr lang="es-ES" sz="1200" dirty="0"/>
+              <a:t>En la guía </a:t>
+            </a:r>
+            <a:r>
+              <a:rPr lang="es-ES" sz="1200" b="1" dirty="0" err="1"/>
+              <a:t>shallow</a:t>
+            </a:r>
+            <a:r>
+              <a:rPr lang="es-ES" sz="1200" dirty="0"/>
+              <a:t>, el caso TM crece muchísimo al final, sobre todo para gap = 2.4 </a:t>
+            </a:r>
+            <a:r>
+              <a:rPr lang="es-ES" sz="1200" dirty="0" err="1"/>
+              <a:t>um</a:t>
+            </a:r>
+            <a:r>
+              <a:rPr lang="es-ES" sz="1200" dirty="0"/>
+              <a:t>. Esto indica que las dos guías apenas se están acoplando, por lo que el valor de </a:t>
+            </a:r>
+            <a:r>
+              <a:rPr lang="es-ES" sz="1200" dirty="0" err="1"/>
+              <a:t>Lpi</a:t>
+            </a:r>
+            <a:r>
+              <a:rPr lang="es-ES" sz="1200" dirty="0"/>
+              <a:t> sale enorme y puede ser menos fiable.</a:t>
+            </a:r>
           </a:p>
         </p:txBody>
       </p:sp>
@@ -12643,6 +12693,66 @@
           </p:sp>
         </mc:Fallback>
       </mc:AlternateContent>
+      <p:pic>
+        <p:nvPicPr>
+          <p:cNvPr id="10" name="Imagen 9">
+            <a:extLst>
+              <a:ext uri="{FF2B5EF4-FFF2-40B4-BE49-F238E27FC236}">
+                <a16:creationId xmlns:a16="http://schemas.microsoft.com/office/drawing/2014/main" id="{93E63C71-320A-FCC8-E50A-7F1E06BBAF6B}"/>
+              </a:ext>
+            </a:extLst>
+          </p:cNvPr>
+          <p:cNvPicPr>
+            <a:picLocks noChangeAspect="1"/>
+          </p:cNvPicPr>
+          <p:nvPr/>
+        </p:nvPicPr>
+        <p:blipFill>
+          <a:blip r:embed="rId7"/>
+          <a:stretch>
+            <a:fillRect/>
+          </a:stretch>
+        </p:blipFill>
+        <p:spPr>
+          <a:xfrm>
+            <a:off x="972382" y="1553550"/>
+            <a:ext cx="4760675" cy="2956567"/>
+          </a:xfrm>
+          <a:prstGeom prst="rect">
+            <a:avLst/>
+          </a:prstGeom>
+        </p:spPr>
+      </p:pic>
+      <p:pic>
+        <p:nvPicPr>
+          <p:cNvPr id="12" name="Imagen 11">
+            <a:extLst>
+              <a:ext uri="{FF2B5EF4-FFF2-40B4-BE49-F238E27FC236}">
+                <a16:creationId xmlns:a16="http://schemas.microsoft.com/office/drawing/2014/main" id="{3654E6D6-D58A-DECD-2CEA-02CC77C8F25E}"/>
+              </a:ext>
+            </a:extLst>
+          </p:cNvPr>
+          <p:cNvPicPr>
+            <a:picLocks noChangeAspect="1"/>
+          </p:cNvPicPr>
+          <p:nvPr/>
+        </p:nvPicPr>
+        <p:blipFill>
+          <a:blip r:embed="rId8"/>
+          <a:stretch>
+            <a:fillRect/>
+          </a:stretch>
+        </p:blipFill>
+        <p:spPr>
+          <a:xfrm>
+            <a:off x="6431063" y="1535676"/>
+            <a:ext cx="5078525" cy="3153963"/>
+          </a:xfrm>
+          <a:prstGeom prst="rect">
+            <a:avLst/>
+          </a:prstGeom>
+        </p:spPr>
+      </p:pic>
     </p:spTree>
     <p:extLst>
       <p:ext uri="{BB962C8B-B14F-4D97-AF65-F5344CB8AC3E}">
@@ -12867,7 +12977,7 @@
         <p:spPr>
           <a:xfrm>
             <a:off x="609441" y="4860334"/>
-            <a:ext cx="11199971" cy="1200329"/>
+            <a:ext cx="11199971" cy="1384995"/>
           </a:xfrm>
           <a:prstGeom prst="rect">
             <a:avLst/>
@@ -12889,49 +12999,172 @@
           </a:bodyPr>
           <a:lstStyle/>
           <a:p>
-            <a:pPr algn="just"/>
-            <a:r>
-              <a:rPr lang="en-US" sz="1200" dirty="0">
-                <a:latin typeface="Arial" panose="020B0604020202020204" pitchFamily="34" charset="0"/>
-                <a:cs typeface="Arial" panose="020B0604020202020204" pitchFamily="34" charset="0"/>
-              </a:rPr>
-              <a:t>Comment results</a:t>
-            </a:r>
-          </a:p>
-          <a:p>
-            <a:pPr algn="just"/>
-            <a:endParaRPr lang="en-US" sz="1200" dirty="0">
-              <a:latin typeface="Arial" panose="020B0604020202020204" pitchFamily="34" charset="0"/>
-              <a:cs typeface="Arial" panose="020B0604020202020204" pitchFamily="34" charset="0"/>
-            </a:endParaRPr>
-          </a:p>
-          <a:p>
-            <a:pPr algn="just"/>
-            <a:endParaRPr lang="en-US" sz="1200" dirty="0">
-              <a:latin typeface="Arial" panose="020B0604020202020204" pitchFamily="34" charset="0"/>
-              <a:cs typeface="Arial" panose="020B0604020202020204" pitchFamily="34" charset="0"/>
-            </a:endParaRPr>
-          </a:p>
-          <a:p>
-            <a:pPr algn="just"/>
-            <a:endParaRPr lang="en-US" sz="1200" dirty="0">
-              <a:latin typeface="Arial" panose="020B0604020202020204" pitchFamily="34" charset="0"/>
-              <a:cs typeface="Arial" panose="020B0604020202020204" pitchFamily="34" charset="0"/>
-            </a:endParaRPr>
-          </a:p>
-          <a:p>
-            <a:pPr algn="just"/>
-            <a:endParaRPr lang="en-US" sz="1200" dirty="0">
-              <a:latin typeface="Arial" panose="020B0604020202020204" pitchFamily="34" charset="0"/>
-              <a:cs typeface="Arial" panose="020B0604020202020204" pitchFamily="34" charset="0"/>
-            </a:endParaRPr>
-          </a:p>
-          <a:p>
-            <a:pPr algn="just"/>
-            <a:endParaRPr lang="en-US" sz="1200" dirty="0">
-              <a:latin typeface="Arial" panose="020B0604020202020204" pitchFamily="34" charset="0"/>
-              <a:cs typeface="Arial" panose="020B0604020202020204" pitchFamily="34" charset="0"/>
-            </a:endParaRPr>
+            <a:pPr marL="171450" indent="-171450">
+              <a:buFont typeface="Arial" panose="020B0604020202020204" pitchFamily="34" charset="0"/>
+              <a:buChar char="•"/>
+            </a:pPr>
+            <a:r>
+              <a:rPr lang="es-ES" sz="1200" dirty="0"/>
+              <a:t>En el caso </a:t>
+            </a:r>
+            <a:r>
+              <a:rPr lang="es-ES" sz="1200" b="1" dirty="0" err="1"/>
+              <a:t>deep</a:t>
+            </a:r>
+            <a:r>
+              <a:rPr lang="es-ES" sz="1200" dirty="0"/>
+              <a:t>, al aumentar la longitud de onda disminuye </a:t>
+            </a:r>
+            <a:r>
+              <a:rPr lang="es-ES" sz="1200" dirty="0" err="1"/>
+              <a:t>Lpi</a:t>
+            </a:r>
+            <a:r>
+              <a:rPr lang="es-ES" sz="1200" dirty="0"/>
+              <a:t> tanto para TE como para TM. Esto tiene sentido porque, para el mismo gap, el campo está menos confinado a longitudes de onda mayores y el acoplamiento entre guías aumenta. Por tanto, se necesita menos longitud para transferir potencia.</a:t>
+            </a:r>
+          </a:p>
+          <a:p>
+            <a:pPr marL="171450" indent="-171450">
+              <a:buFont typeface="Arial" panose="020B0604020202020204" pitchFamily="34" charset="0"/>
+              <a:buChar char="•"/>
+            </a:pPr>
+            <a:r>
+              <a:rPr lang="es-ES" sz="1200" dirty="0"/>
+              <a:t>En </a:t>
+            </a:r>
+            <a:r>
+              <a:rPr lang="es-ES" sz="1200" dirty="0" err="1"/>
+              <a:t>deep</a:t>
+            </a:r>
+            <a:r>
+              <a:rPr lang="es-ES" sz="1200" dirty="0"/>
+              <a:t>, TE pasa de 67 </a:t>
+            </a:r>
+            <a:r>
+              <a:rPr lang="es-ES" sz="1200" dirty="0" err="1"/>
+              <a:t>um</a:t>
+            </a:r>
+            <a:r>
+              <a:rPr lang="es-ES" sz="1200" dirty="0"/>
+              <a:t> a 40 </a:t>
+            </a:r>
+            <a:r>
+              <a:rPr lang="es-ES" sz="1200" dirty="0" err="1"/>
+              <a:t>um</a:t>
+            </a:r>
+            <a:r>
+              <a:rPr lang="es-ES" sz="1200" dirty="0"/>
+              <a:t>, y TM pasa de 41 </a:t>
+            </a:r>
+            <a:r>
+              <a:rPr lang="es-ES" sz="1200" dirty="0" err="1"/>
+              <a:t>um</a:t>
+            </a:r>
+            <a:r>
+              <a:rPr lang="es-ES" sz="1200" dirty="0"/>
+              <a:t> a 31 </a:t>
+            </a:r>
+            <a:r>
+              <a:rPr lang="es-ES" sz="1200" dirty="0" err="1"/>
+              <a:t>um</a:t>
+            </a:r>
+            <a:r>
+              <a:rPr lang="es-ES" sz="1200" dirty="0"/>
+              <a:t>. TM tiene menor </a:t>
+            </a:r>
+            <a:r>
+              <a:rPr lang="es-ES" sz="1200" dirty="0" err="1"/>
+              <a:t>Lpi</a:t>
+            </a:r>
+            <a:r>
+              <a:rPr lang="es-ES" sz="1200" dirty="0"/>
+              <a:t> que TE, así que para esta geometría se acopla más rápido.</a:t>
+            </a:r>
+          </a:p>
+          <a:p>
+            <a:pPr marL="171450" indent="-171450">
+              <a:buFont typeface="Arial" panose="020B0604020202020204" pitchFamily="34" charset="0"/>
+              <a:buChar char="•"/>
+            </a:pPr>
+            <a:r>
+              <a:rPr lang="es-ES" sz="1200" dirty="0"/>
+              <a:t>En el caso </a:t>
+            </a:r>
+            <a:r>
+              <a:rPr lang="es-ES" sz="1200" b="1" dirty="0" err="1"/>
+              <a:t>shallow</a:t>
+            </a:r>
+            <a:r>
+              <a:rPr lang="es-ES" sz="1200" dirty="0"/>
+              <a:t>, TE también disminuye suavemente, de 42 </a:t>
+            </a:r>
+            <a:r>
+              <a:rPr lang="es-ES" sz="1200" dirty="0" err="1"/>
+              <a:t>um</a:t>
+            </a:r>
+            <a:r>
+              <a:rPr lang="es-ES" sz="1200" dirty="0"/>
+              <a:t> a 33 </a:t>
+            </a:r>
+            <a:r>
+              <a:rPr lang="es-ES" sz="1200" dirty="0" err="1"/>
+              <a:t>um</a:t>
+            </a:r>
+            <a:r>
+              <a:rPr lang="es-ES" sz="1200" dirty="0"/>
+              <a:t>. En cambio, TM tiene valores mucho más grandes (empieza en 850 </a:t>
+            </a:r>
+            <a:r>
+              <a:rPr lang="es-ES" sz="1200" dirty="0" err="1"/>
+              <a:t>um</a:t>
+            </a:r>
+            <a:r>
+              <a:rPr lang="es-ES" sz="1200" dirty="0"/>
+              <a:t> aprox. y baja hasta unos 400 </a:t>
+            </a:r>
+            <a:r>
+              <a:rPr lang="es-ES" sz="1200" dirty="0" err="1"/>
+              <a:t>um</a:t>
+            </a:r>
+            <a:r>
+              <a:rPr lang="es-ES" sz="1200" dirty="0"/>
+              <a:t> y luego vuelve a subir ligeramente. Esto puede indicar que la polarización TM en </a:t>
+            </a:r>
+            <a:r>
+              <a:rPr lang="es-ES" sz="1200" dirty="0" err="1"/>
+              <a:t>shallow</a:t>
+            </a:r>
+            <a:r>
+              <a:rPr lang="es-ES" sz="1200" dirty="0"/>
+              <a:t> se acopla mucho menos que TE y es más sensible a la longitud de onda.</a:t>
+            </a:r>
+          </a:p>
+          <a:p>
+            <a:pPr marL="171450" indent="-171450">
+              <a:buFont typeface="Arial" panose="020B0604020202020204" pitchFamily="34" charset="0"/>
+              <a:buChar char="•"/>
+            </a:pPr>
+            <a:r>
+              <a:rPr lang="es-ES" sz="1200" dirty="0"/>
+              <a:t>Se podría afirmar que el acoplador direccional depende claramente de la longitud de onda y de la polarización. Además el comportamiento de la guía </a:t>
+            </a:r>
+            <a:r>
+              <a:rPr lang="es-ES" sz="1200" dirty="0" err="1"/>
+              <a:t>shallow</a:t>
+            </a:r>
+            <a:r>
+              <a:rPr lang="es-ES" sz="1200" dirty="0"/>
+              <a:t> es muy distinto al de la </a:t>
+            </a:r>
+            <a:r>
+              <a:rPr lang="es-ES" sz="1200" dirty="0" err="1"/>
+              <a:t>deep</a:t>
+            </a:r>
+            <a:r>
+              <a:rPr lang="es-ES" sz="1200" dirty="0"/>
+              <a:t>, sobre todo para el modo TM.</a:t>
+            </a:r>
           </a:p>
         </p:txBody>
       </p:sp>
@@ -13355,6 +13588,66 @@
           </p:sp>
         </mc:Fallback>
       </mc:AlternateContent>
+      <p:pic>
+        <p:nvPicPr>
+          <p:cNvPr id="10" name="Imagen 9">
+            <a:extLst>
+              <a:ext uri="{FF2B5EF4-FFF2-40B4-BE49-F238E27FC236}">
+                <a16:creationId xmlns:a16="http://schemas.microsoft.com/office/drawing/2014/main" id="{38D9464C-04C9-597A-BA33-6CE9C5989C1D}"/>
+              </a:ext>
+            </a:extLst>
+          </p:cNvPr>
+          <p:cNvPicPr>
+            <a:picLocks noChangeAspect="1"/>
+          </p:cNvPicPr>
+          <p:nvPr/>
+        </p:nvPicPr>
+        <p:blipFill>
+          <a:blip r:embed="rId7"/>
+          <a:stretch>
+            <a:fillRect/>
+          </a:stretch>
+        </p:blipFill>
+        <p:spPr>
+          <a:xfrm>
+            <a:off x="711279" y="1490610"/>
+            <a:ext cx="5192880" cy="3220900"/>
+          </a:xfrm>
+          <a:prstGeom prst="rect">
+            <a:avLst/>
+          </a:prstGeom>
+        </p:spPr>
+      </p:pic>
+      <p:pic>
+        <p:nvPicPr>
+          <p:cNvPr id="12" name="Imagen 11">
+            <a:extLst>
+              <a:ext uri="{FF2B5EF4-FFF2-40B4-BE49-F238E27FC236}">
+                <a16:creationId xmlns:a16="http://schemas.microsoft.com/office/drawing/2014/main" id="{025670CE-1751-5277-7DFA-437290FBE3A5}"/>
+              </a:ext>
+            </a:extLst>
+          </p:cNvPr>
+          <p:cNvPicPr>
+            <a:picLocks noChangeAspect="1"/>
+          </p:cNvPicPr>
+          <p:nvPr/>
+        </p:nvPicPr>
+        <p:blipFill>
+          <a:blip r:embed="rId8"/>
+          <a:stretch>
+            <a:fillRect/>
+          </a:stretch>
+        </p:blipFill>
+        <p:spPr>
+          <a:xfrm>
+            <a:off x="6361771" y="1511173"/>
+            <a:ext cx="5220787" cy="3238210"/>
+          </a:xfrm>
+          <a:prstGeom prst="rect">
+            <a:avLst/>
+          </a:prstGeom>
+        </p:spPr>
+      </p:pic>
     </p:spTree>
     <p:extLst>
       <p:ext uri="{BB962C8B-B14F-4D97-AF65-F5344CB8AC3E}">
@@ -13573,7 +13866,7 @@
         <p:spPr>
           <a:xfrm>
             <a:off x="609441" y="4860334"/>
-            <a:ext cx="11199971" cy="1200329"/>
+            <a:ext cx="11199971" cy="1384995"/>
           </a:xfrm>
           <a:prstGeom prst="rect">
             <a:avLst/>
@@ -13595,45 +13888,114 @@
           </a:bodyPr>
           <a:lstStyle/>
           <a:p>
-            <a:pPr algn="just"/>
-            <a:r>
-              <a:rPr lang="en-US" sz="1200" dirty="0">
-                <a:latin typeface="Arial" panose="020B0604020202020204" pitchFamily="34" charset="0"/>
-                <a:cs typeface="Arial" panose="020B0604020202020204" pitchFamily="34" charset="0"/>
-              </a:rPr>
-              <a:t>Comment results (Important. Compare with Directional Coupler)</a:t>
-            </a:r>
-          </a:p>
-          <a:p>
-            <a:pPr algn="just"/>
-            <a:endParaRPr lang="en-US" sz="1200" dirty="0">
-              <a:latin typeface="Arial" panose="020B0604020202020204" pitchFamily="34" charset="0"/>
-              <a:cs typeface="Arial" panose="020B0604020202020204" pitchFamily="34" charset="0"/>
-            </a:endParaRPr>
-          </a:p>
-          <a:p>
-            <a:pPr algn="just"/>
-            <a:endParaRPr lang="en-US" sz="1200" dirty="0">
-              <a:latin typeface="Arial" panose="020B0604020202020204" pitchFamily="34" charset="0"/>
-              <a:cs typeface="Arial" panose="020B0604020202020204" pitchFamily="34" charset="0"/>
-            </a:endParaRPr>
-          </a:p>
-          <a:p>
-            <a:pPr algn="just"/>
-            <a:endParaRPr lang="en-US" sz="1200" dirty="0">
-              <a:latin typeface="Arial" panose="020B0604020202020204" pitchFamily="34" charset="0"/>
-              <a:cs typeface="Arial" panose="020B0604020202020204" pitchFamily="34" charset="0"/>
-            </a:endParaRPr>
-          </a:p>
-          <a:p>
-            <a:pPr algn="just"/>
-            <a:endParaRPr lang="en-US" sz="1200" dirty="0">
-              <a:latin typeface="Arial" panose="020B0604020202020204" pitchFamily="34" charset="0"/>
-              <a:cs typeface="Arial" panose="020B0604020202020204" pitchFamily="34" charset="0"/>
-            </a:endParaRPr>
-          </a:p>
-          <a:p>
-            <a:pPr algn="just"/>
+            <a:pPr marL="171450" indent="-171450">
+              <a:buFont typeface="Arial" panose="020B0604020202020204" pitchFamily="34" charset="0"/>
+              <a:buChar char="•"/>
+            </a:pPr>
+            <a:r>
+              <a:rPr lang="es-ES" sz="1200" dirty="0"/>
+              <a:t>En el MMI se observa que </a:t>
+            </a:r>
+            <a:r>
+              <a:rPr lang="es-ES" sz="1200" dirty="0" err="1"/>
+              <a:t>Lpi</a:t>
+            </a:r>
+            <a:r>
+              <a:rPr lang="es-ES" sz="1200" dirty="0"/>
+              <a:t> cambia con la longitud de onda, pero de forma suave. La diferencia entre TE y TM es pequeña comparada con el acoplador direccional. En el MMI las curvas TE y TM están bastante cerca, mientras que en el </a:t>
+            </a:r>
+            <a:r>
+              <a:rPr lang="es-ES" sz="1200" dirty="0" err="1"/>
+              <a:t>directional</a:t>
+            </a:r>
+            <a:r>
+              <a:rPr lang="es-ES" sz="1200" dirty="0"/>
+              <a:t> </a:t>
+            </a:r>
+            <a:r>
+              <a:rPr lang="es-ES" sz="1200" dirty="0" err="1"/>
+              <a:t>coupler</a:t>
+            </a:r>
+            <a:r>
+              <a:rPr lang="es-ES" sz="1200" dirty="0"/>
+              <a:t>, especialmente en </a:t>
+            </a:r>
+            <a:r>
+              <a:rPr lang="es-ES" sz="1200" dirty="0" err="1"/>
+              <a:t>shallow</a:t>
+            </a:r>
+            <a:r>
+              <a:rPr lang="es-ES" sz="1200" dirty="0"/>
+              <a:t>, TM tenía valores de </a:t>
+            </a:r>
+            <a:r>
+              <a:rPr lang="es-ES" sz="1200" dirty="0" err="1"/>
+              <a:t>Lpi</a:t>
+            </a:r>
+            <a:r>
+              <a:rPr lang="es-ES" sz="1200" dirty="0"/>
+              <a:t> mucho más grandes que TE.</a:t>
+            </a:r>
+          </a:p>
+          <a:p>
+            <a:pPr marL="171450" indent="-171450">
+              <a:buFont typeface="Arial" panose="020B0604020202020204" pitchFamily="34" charset="0"/>
+              <a:buChar char="•"/>
+            </a:pPr>
+            <a:r>
+              <a:rPr lang="es-ES" sz="1200" dirty="0"/>
+              <a:t>Comparado con el </a:t>
+            </a:r>
+            <a:r>
+              <a:rPr lang="es-ES" sz="1200" dirty="0" err="1"/>
+              <a:t>directional</a:t>
+            </a:r>
+            <a:r>
+              <a:rPr lang="es-ES" sz="1200" dirty="0"/>
+              <a:t> </a:t>
+            </a:r>
+            <a:r>
+              <a:rPr lang="es-ES" sz="1200" dirty="0" err="1"/>
+              <a:t>coupler</a:t>
+            </a:r>
+            <a:r>
+              <a:rPr lang="es-ES" sz="1200" dirty="0"/>
+              <a:t>, el MMI parece menos sensible a la longitud de onda. En el </a:t>
+            </a:r>
+            <a:r>
+              <a:rPr lang="es-ES" sz="1200" dirty="0" err="1"/>
+              <a:t>directional</a:t>
+            </a:r>
+            <a:r>
+              <a:rPr lang="es-ES" sz="1200" dirty="0"/>
+              <a:t> </a:t>
+            </a:r>
+            <a:r>
+              <a:rPr lang="es-ES" sz="1200" dirty="0" err="1"/>
+              <a:t>coupler</a:t>
+            </a:r>
+            <a:r>
+              <a:rPr lang="es-ES" sz="1200" dirty="0"/>
+              <a:t> </a:t>
+            </a:r>
+            <a:r>
+              <a:rPr lang="es-ES" sz="1200" dirty="0" err="1"/>
+              <a:t>Lpi</a:t>
+            </a:r>
+            <a:r>
+              <a:rPr lang="es-ES" sz="1200" dirty="0"/>
+              <a:t> cambiaba mucho más al variar lambda, porque el acoplo depende directamente del campo evanescente entre dos guías. En cambio en el MMI el reparto se produce por interferencia entre varios modos dentro de una región multimodo, por lo que la variación es más suave.</a:t>
+            </a:r>
+          </a:p>
+          <a:p>
+            <a:pPr marL="171450" indent="-171450">
+              <a:buFont typeface="Arial" panose="020B0604020202020204" pitchFamily="34" charset="0"/>
+              <a:buChar char="•"/>
+            </a:pPr>
+            <a:r>
+              <a:rPr lang="es-ES" sz="1200" dirty="0"/>
+              <a:t>Se podría concluir que el acoplador MMI también depende de la longitud de onda, pero este es más estable que el acoplador direccional y presenta una diferencia menor entre TE y TM. Esto hace que el MMI sea más “robusto” frente a cambios de longitud de onda.</a:t>
+            </a:r>
             <a:endParaRPr lang="en-US" sz="1200" dirty="0">
               <a:latin typeface="Arial" panose="020B0604020202020204" pitchFamily="34" charset="0"/>
               <a:cs typeface="Arial" panose="020B0604020202020204" pitchFamily="34" charset="0"/>
@@ -14061,6 +14423,66 @@
           </p:sp>
         </mc:Fallback>
       </mc:AlternateContent>
+      <p:pic>
+        <p:nvPicPr>
+          <p:cNvPr id="8" name="Imagen 7">
+            <a:extLst>
+              <a:ext uri="{FF2B5EF4-FFF2-40B4-BE49-F238E27FC236}">
+                <a16:creationId xmlns:a16="http://schemas.microsoft.com/office/drawing/2014/main" id="{E0F5F483-DF07-C697-F6B7-0CF409E648F4}"/>
+              </a:ext>
+            </a:extLst>
+          </p:cNvPr>
+          <p:cNvPicPr>
+            <a:picLocks noChangeAspect="1"/>
+          </p:cNvPicPr>
+          <p:nvPr/>
+        </p:nvPicPr>
+        <p:blipFill>
+          <a:blip r:embed="rId7"/>
+          <a:stretch>
+            <a:fillRect/>
+          </a:stretch>
+        </p:blipFill>
+        <p:spPr>
+          <a:xfrm>
+            <a:off x="762000" y="1502459"/>
+            <a:ext cx="5105400" cy="3166641"/>
+          </a:xfrm>
+          <a:prstGeom prst="rect">
+            <a:avLst/>
+          </a:prstGeom>
+        </p:spPr>
+      </p:pic>
+      <p:pic>
+        <p:nvPicPr>
+          <p:cNvPr id="12" name="Imagen 11">
+            <a:extLst>
+              <a:ext uri="{FF2B5EF4-FFF2-40B4-BE49-F238E27FC236}">
+                <a16:creationId xmlns:a16="http://schemas.microsoft.com/office/drawing/2014/main" id="{505E4646-AB79-6AF7-7894-5871F7C64B8B}"/>
+              </a:ext>
+            </a:extLst>
+          </p:cNvPr>
+          <p:cNvPicPr>
+            <a:picLocks noChangeAspect="1"/>
+          </p:cNvPicPr>
+          <p:nvPr/>
+        </p:nvPicPr>
+        <p:blipFill>
+          <a:blip r:embed="rId8"/>
+          <a:stretch>
+            <a:fillRect/>
+          </a:stretch>
+        </p:blipFill>
+        <p:spPr>
+          <a:xfrm>
+            <a:off x="6413403" y="1464572"/>
+            <a:ext cx="5234858" cy="3246938"/>
+          </a:xfrm>
+          <a:prstGeom prst="rect">
+            <a:avLst/>
+          </a:prstGeom>
+        </p:spPr>
+      </p:pic>
     </p:spTree>
     <p:extLst>
       <p:ext uri="{BB962C8B-B14F-4D97-AF65-F5344CB8AC3E}">
@@ -14278,8 +14700,8 @@
         </p:nvSpPr>
         <p:spPr>
           <a:xfrm>
-            <a:off x="609441" y="4860334"/>
-            <a:ext cx="11199971" cy="1384995"/>
+            <a:off x="609441" y="4495800"/>
+            <a:ext cx="11199971" cy="1846659"/>
           </a:xfrm>
           <a:prstGeom prst="rect">
             <a:avLst/>
@@ -14303,7 +14725,7 @@
           <a:p>
             <a:pPr algn="just"/>
             <a:r>
-              <a:rPr lang="en-US" sz="1200" dirty="0">
+              <a:rPr lang="en-US" sz="1200" b="1" dirty="0">
                 <a:latin typeface="Arial" panose="020B0604020202020204" pitchFamily="34" charset="0"/>
                 <a:cs typeface="Arial" panose="020B0604020202020204" pitchFamily="34" charset="0"/>
               </a:rPr>
@@ -14311,46 +14733,218 @@
             </a:r>
           </a:p>
           <a:p>
-            <a:pPr algn="just"/>
-            <a:endParaRPr lang="en-US" sz="1200" dirty="0">
-              <a:latin typeface="Arial" panose="020B0604020202020204" pitchFamily="34" charset="0"/>
-              <a:cs typeface="Arial" panose="020B0604020202020204" pitchFamily="34" charset="0"/>
-            </a:endParaRPr>
-          </a:p>
-          <a:p>
-            <a:pPr algn="just"/>
-            <a:endParaRPr lang="en-US" sz="1200" dirty="0">
-              <a:latin typeface="Arial" panose="020B0604020202020204" pitchFamily="34" charset="0"/>
-              <a:cs typeface="Arial" panose="020B0604020202020204" pitchFamily="34" charset="0"/>
-            </a:endParaRPr>
-          </a:p>
-          <a:p>
-            <a:pPr algn="just"/>
-            <a:endParaRPr lang="en-US" sz="1200" dirty="0">
-              <a:latin typeface="Arial" panose="020B0604020202020204" pitchFamily="34" charset="0"/>
-              <a:cs typeface="Arial" panose="020B0604020202020204" pitchFamily="34" charset="0"/>
-            </a:endParaRPr>
-          </a:p>
-          <a:p>
-            <a:pPr algn="just"/>
-            <a:endParaRPr lang="en-US" sz="1200" dirty="0">
-              <a:latin typeface="Arial" panose="020B0604020202020204" pitchFamily="34" charset="0"/>
-              <a:cs typeface="Arial" panose="020B0604020202020204" pitchFamily="34" charset="0"/>
-            </a:endParaRPr>
-          </a:p>
-          <a:p>
-            <a:pPr algn="just"/>
-            <a:endParaRPr lang="en-US" sz="1200" dirty="0">
-              <a:latin typeface="Arial" panose="020B0604020202020204" pitchFamily="34" charset="0"/>
-              <a:cs typeface="Arial" panose="020B0604020202020204" pitchFamily="34" charset="0"/>
-            </a:endParaRPr>
-          </a:p>
-          <a:p>
-            <a:pPr algn="just"/>
-            <a:endParaRPr lang="en-US" sz="1200" dirty="0">
-              <a:latin typeface="Arial" panose="020B0604020202020204" pitchFamily="34" charset="0"/>
-              <a:cs typeface="Arial" panose="020B0604020202020204" pitchFamily="34" charset="0"/>
-            </a:endParaRPr>
+            <a:pPr marL="171450" indent="-171450">
+              <a:buFont typeface="Arial" panose="020B0604020202020204" pitchFamily="34" charset="0"/>
+              <a:buChar char="•"/>
+            </a:pPr>
+            <a:r>
+              <a:rPr lang="es-ES" sz="1200" dirty="0"/>
+              <a:t>En este último extra se ve que al aumentar la anchura del cuerpo MMI también aumenta </a:t>
+            </a:r>
+            <a:r>
+              <a:rPr lang="es-ES" sz="1200" dirty="0" err="1"/>
+              <a:t>Lpi</a:t>
+            </a:r>
+            <a:r>
+              <a:rPr lang="es-ES" sz="1200" dirty="0"/>
+              <a:t>, tanto en </a:t>
+            </a:r>
+            <a:r>
+              <a:rPr lang="es-ES" sz="1200" dirty="0" err="1"/>
+              <a:t>deep</a:t>
+            </a:r>
+            <a:r>
+              <a:rPr lang="es-ES" sz="1200" dirty="0"/>
+              <a:t> como en </a:t>
+            </a:r>
+            <a:r>
+              <a:rPr lang="es-ES" sz="1200" dirty="0" err="1"/>
+              <a:t>shallow</a:t>
+            </a:r>
+            <a:r>
+              <a:rPr lang="es-ES" sz="1200" dirty="0"/>
+              <a:t>. Esto tiene sentido porque un MMI más ancho necesita más longitud para que se forme correctamente la autoimagen.</a:t>
+            </a:r>
+          </a:p>
+          <a:p>
+            <a:pPr marL="171450" indent="-171450">
+              <a:buFont typeface="Arial" panose="020B0604020202020204" pitchFamily="34" charset="0"/>
+              <a:buChar char="•"/>
+            </a:pPr>
+            <a:r>
+              <a:rPr lang="es-ES" sz="1200" dirty="0"/>
+              <a:t>Las curvas TE y TM son bastante parecidas, mucho más cercanas que en el acoplador direccional. En </a:t>
+            </a:r>
+            <a:r>
+              <a:rPr lang="es-ES" sz="1200" dirty="0" err="1"/>
+              <a:t>deep</a:t>
+            </a:r>
+            <a:r>
+              <a:rPr lang="es-ES" sz="1200" dirty="0"/>
+              <a:t>, TM queda siempre un poco por encima de TE, y el punto más cercano está en </a:t>
+            </a:r>
+            <a:r>
+              <a:rPr lang="es-ES" sz="1200" dirty="0" err="1"/>
+              <a:t>wMMI</a:t>
+            </a:r>
+            <a:r>
+              <a:rPr lang="es-ES" sz="1200" dirty="0"/>
+              <a:t> = 10 </a:t>
+            </a:r>
+            <a:r>
+              <a:rPr lang="es-ES" sz="1200" dirty="0" err="1"/>
+              <a:t>um</a:t>
+            </a:r>
+            <a:r>
+              <a:rPr lang="es-ES" sz="1200" dirty="0"/>
+              <a:t>, con </a:t>
+            </a:r>
+            <a:r>
+              <a:rPr lang="es-ES" sz="1200" dirty="0" err="1"/>
+              <a:t>Lpi_TE</a:t>
+            </a:r>
+            <a:r>
+              <a:rPr lang="es-ES" sz="1200" dirty="0"/>
+              <a:t> = 153.77 </a:t>
+            </a:r>
+            <a:r>
+              <a:rPr lang="es-ES" sz="1200" dirty="0" err="1"/>
+              <a:t>um</a:t>
+            </a:r>
+            <a:r>
+              <a:rPr lang="es-ES" sz="1200" dirty="0"/>
+              <a:t> </a:t>
+            </a:r>
+            <a:r>
+              <a:rPr lang="es-ES" sz="1600" dirty="0"/>
+              <a:t>≈</a:t>
+            </a:r>
+            <a:r>
+              <a:rPr lang="es-ES" dirty="0"/>
+              <a:t> </a:t>
+            </a:r>
+            <a:r>
+              <a:rPr lang="es-ES" sz="1200" dirty="0" err="1"/>
+              <a:t>Lpi_TM</a:t>
+            </a:r>
+            <a:r>
+              <a:rPr lang="es-ES" sz="1200" dirty="0"/>
+              <a:t> = 155.37 </a:t>
+            </a:r>
+            <a:r>
+              <a:rPr lang="es-ES" sz="1200" dirty="0" err="1"/>
+              <a:t>um</a:t>
+            </a:r>
+            <a:r>
+              <a:rPr lang="es-ES" sz="1200" dirty="0"/>
+              <a:t>. En </a:t>
+            </a:r>
+            <a:r>
+              <a:rPr lang="es-ES" sz="1200" dirty="0" err="1"/>
+              <a:t>shallow</a:t>
+            </a:r>
+            <a:r>
+              <a:rPr lang="es-ES" sz="1200" dirty="0"/>
+              <a:t>, las curvas casi coinciden para </a:t>
+            </a:r>
+            <a:r>
+              <a:rPr lang="es-ES" sz="1200" dirty="0" err="1"/>
+              <a:t>wMMI</a:t>
+            </a:r>
+            <a:r>
+              <a:rPr lang="es-ES" sz="1200" dirty="0"/>
+              <a:t> = 10 </a:t>
+            </a:r>
+            <a:r>
+              <a:rPr lang="es-ES" sz="1200" dirty="0" err="1"/>
+              <a:t>um</a:t>
+            </a:r>
+            <a:r>
+              <a:rPr lang="es-ES" sz="1200" dirty="0"/>
+              <a:t>, con </a:t>
+            </a:r>
+            <a:r>
+              <a:rPr lang="es-ES" sz="1200" dirty="0" err="1"/>
+              <a:t>Lpi</a:t>
+            </a:r>
+            <a:r>
+              <a:rPr lang="es-ES" sz="1200" dirty="0"/>
+              <a:t> TE = 161.99 </a:t>
+            </a:r>
+            <a:r>
+              <a:rPr lang="es-ES" sz="1200" dirty="0" err="1"/>
+              <a:t>um</a:t>
+            </a:r>
+            <a:r>
+              <a:rPr lang="es-ES" sz="1200" dirty="0"/>
+              <a:t> y </a:t>
+            </a:r>
+            <a:r>
+              <a:rPr lang="es-ES" sz="1200" dirty="0" err="1"/>
+              <a:t>Lpi_TM</a:t>
+            </a:r>
+            <a:r>
+              <a:rPr lang="es-ES" sz="1200" dirty="0"/>
+              <a:t> = 161.86 </a:t>
+            </a:r>
+            <a:r>
+              <a:rPr lang="es-ES" sz="1200" dirty="0" err="1"/>
+              <a:t>um</a:t>
+            </a:r>
+            <a:r>
+              <a:rPr lang="es-ES" sz="1200" dirty="0"/>
+              <a:t>.</a:t>
+            </a:r>
+          </a:p>
+          <a:p>
+            <a:pPr marL="171450" indent="-171450">
+              <a:buFont typeface="Arial" panose="020B0604020202020204" pitchFamily="34" charset="0"/>
+              <a:buChar char="•"/>
+            </a:pPr>
+            <a:r>
+              <a:rPr lang="es-ES" sz="1200" dirty="0"/>
+              <a:t>Por tanto, </a:t>
+            </a:r>
+            <a:r>
+              <a:rPr lang="es-ES" sz="1200" u="sng" dirty="0"/>
+              <a:t>sí</a:t>
+            </a:r>
+            <a:r>
+              <a:rPr lang="es-ES" sz="1200" dirty="0"/>
+              <a:t> se puede encontrar un punto donde el MMI funcione casi igual para TE y TM. En nuestros resultados, el mejor candidato es el MMI </a:t>
+            </a:r>
+            <a:r>
+              <a:rPr lang="es-ES" sz="1200" dirty="0" err="1"/>
+              <a:t>shallow</a:t>
+            </a:r>
+            <a:r>
+              <a:rPr lang="es-ES" sz="1200" dirty="0"/>
+              <a:t> con ancho del cuerpo 10 </a:t>
+            </a:r>
+            <a:r>
+              <a:rPr lang="es-ES" sz="1200" dirty="0" err="1"/>
+              <a:t>um</a:t>
+            </a:r>
+            <a:r>
+              <a:rPr lang="es-ES" sz="1200" dirty="0"/>
+              <a:t>, porque las dos </a:t>
+            </a:r>
+            <a:r>
+              <a:rPr lang="es-ES" sz="1200" dirty="0" err="1"/>
+              <a:t>Lpi</a:t>
+            </a:r>
+            <a:r>
+              <a:rPr lang="es-ES" sz="1200" dirty="0"/>
+              <a:t> son prácticamente iguales. Aun así, sería “casi” independiente de polarización, no perfecto porque aquí solo estamos comparando </a:t>
+            </a:r>
+            <a:r>
+              <a:rPr lang="es-ES" sz="1200" dirty="0" err="1"/>
+              <a:t>Lpi</a:t>
+            </a:r>
+            <a:r>
+              <a:rPr lang="es-ES" sz="1200" dirty="0"/>
+              <a:t> y no toda la propagación completa.</a:t>
+            </a:r>
           </a:p>
         </p:txBody>
       </p:sp>
@@ -14368,7 +14962,7 @@
         </p:nvSpPr>
         <p:spPr>
           <a:xfrm>
-            <a:off x="609441" y="1447800"/>
+            <a:off x="609441" y="1143000"/>
             <a:ext cx="5486559" cy="3306028"/>
           </a:xfrm>
           <a:prstGeom prst="rect">
@@ -14420,7 +15014,7 @@
         </p:nvSpPr>
         <p:spPr>
           <a:xfrm>
-            <a:off x="6321424" y="1447800"/>
+            <a:off x="6321424" y="1143000"/>
             <a:ext cx="5486559" cy="3306028"/>
           </a:xfrm>
           <a:prstGeom prst="rect">
@@ -14472,7 +15066,7 @@
         </p:nvSpPr>
         <p:spPr>
           <a:xfrm>
-            <a:off x="6331152" y="4342178"/>
+            <a:off x="6331152" y="3886200"/>
             <a:ext cx="2269787" cy="369332"/>
           </a:xfrm>
           <a:prstGeom prst="rect">
@@ -14758,6 +15352,66 @@
           </p:sp>
         </mc:Fallback>
       </mc:AlternateContent>
+      <p:pic>
+        <p:nvPicPr>
+          <p:cNvPr id="8" name="Imagen 7">
+            <a:extLst>
+              <a:ext uri="{FF2B5EF4-FFF2-40B4-BE49-F238E27FC236}">
+                <a16:creationId xmlns:a16="http://schemas.microsoft.com/office/drawing/2014/main" id="{15553349-34FD-0A79-8613-831506807E0C}"/>
+              </a:ext>
+            </a:extLst>
+          </p:cNvPr>
+          <p:cNvPicPr>
+            <a:picLocks noChangeAspect="1"/>
+          </p:cNvPicPr>
+          <p:nvPr/>
+        </p:nvPicPr>
+        <p:blipFill>
+          <a:blip r:embed="rId7"/>
+          <a:stretch>
+            <a:fillRect/>
+          </a:stretch>
+        </p:blipFill>
+        <p:spPr>
+          <a:xfrm>
+            <a:off x="758664" y="1207049"/>
+            <a:ext cx="5184777" cy="3215874"/>
+          </a:xfrm>
+          <a:prstGeom prst="rect">
+            <a:avLst/>
+          </a:prstGeom>
+        </p:spPr>
+      </p:pic>
+      <p:pic>
+        <p:nvPicPr>
+          <p:cNvPr id="12" name="Imagen 11">
+            <a:extLst>
+              <a:ext uri="{FF2B5EF4-FFF2-40B4-BE49-F238E27FC236}">
+                <a16:creationId xmlns:a16="http://schemas.microsoft.com/office/drawing/2014/main" id="{C659494C-0240-9A9C-3688-3191C8904179}"/>
+              </a:ext>
+            </a:extLst>
+          </p:cNvPr>
+          <p:cNvPicPr>
+            <a:picLocks noChangeAspect="1"/>
+          </p:cNvPicPr>
+          <p:nvPr/>
+        </p:nvPicPr>
+        <p:blipFill>
+          <a:blip r:embed="rId8"/>
+          <a:stretch>
+            <a:fillRect/>
+          </a:stretch>
+        </p:blipFill>
+        <p:spPr>
+          <a:xfrm>
+            <a:off x="6437183" y="1231750"/>
+            <a:ext cx="5017398" cy="3112056"/>
+          </a:xfrm>
+          <a:prstGeom prst="rect">
+            <a:avLst/>
+          </a:prstGeom>
+        </p:spPr>
+      </p:pic>
     </p:spTree>
     <p:extLst>
       <p:ext uri="{BB962C8B-B14F-4D97-AF65-F5344CB8AC3E}">
